--- a/Presentación/L6G3_presentacion.pptx
+++ b/Presentación/L6G3_presentacion.pptx
@@ -26882,7 +26882,7 @@
           <p:nvPr>
             <p:extLst>
               <p:ext uri="{D42A27DB-BD31-4B8C-83A1-F6EECF244321}">
-                <p14:modId xmlns:p14="http://schemas.microsoft.com/office/powerpoint/2010/main" val="343298155"/>
+                <p14:modId xmlns:p14="http://schemas.microsoft.com/office/powerpoint/2010/main" val="2311861265"/>
               </p:ext>
             </p:extLst>
           </p:nvPr>
@@ -27372,7 +27372,7 @@
                     <a:p>
                       <a:pPr algn="ctr"/>
                       <a:r>
-                        <a:rPr sz="1300">
+                        <a:rPr sz="1300" dirty="0">
                           <a:solidFill>
                             <a:srgbClr val="000000"/>
                           </a:solidFill>
@@ -27492,7 +27492,9 @@
                     <a:bodyPr/>
                     <a:lstStyle/>
                     <a:p>
+                      <a:pPr algn="ctr"/>
                       <a:r>
+                        <a:rPr sz="1300" dirty="0"/>
                         <a:t>4p×2h</a:t>
                       </a:r>
                     </a:p>
@@ -41532,7 +41534,7 @@
           <p:nvPr>
             <p:extLst>
               <p:ext uri="{D42A27DB-BD31-4B8C-83A1-F6EECF244321}">
-                <p14:modId xmlns:p14="http://schemas.microsoft.com/office/powerpoint/2010/main" val="2364320481"/>
+                <p14:modId xmlns:p14="http://schemas.microsoft.com/office/powerpoint/2010/main" val="3574323818"/>
               </p:ext>
             </p:extLst>
           </p:nvPr>
@@ -42218,22 +42220,13 @@
                     <a:p>
                       <a:pPr algn="ctr"/>
                       <a:r>
-                        <a:rPr sz="1300" dirty="0">
+                        <a:rPr lang="es-ES" sz="1300" dirty="0">
                           <a:solidFill>
                             <a:srgbClr val="000000"/>
                           </a:solidFill>
-                          <a:latin typeface="Calibri"/>
+                          <a:latin typeface="+mn-lt"/>
                         </a:rPr>
-                        <a:t>1 </a:t>
-                      </a:r>
-                      <a:r>
-                        <a:rPr sz="1300" dirty="0" err="1">
-                          <a:solidFill>
-                            <a:srgbClr val="000000"/>
-                          </a:solidFill>
-                          <a:latin typeface="Calibri"/>
-                        </a:rPr>
-                        <a:t>hilo</a:t>
+                        <a:t>1 hilo lógico CUDA por celda</a:t>
                       </a:r>
                       <a:r>
                         <a:rPr sz="1300" dirty="0">
@@ -42242,43 +42235,7 @@
                           </a:solidFill>
                           <a:latin typeface="Calibri"/>
                         </a:rPr>
-                        <a:t> CUDA </a:t>
-                      </a:r>
-                      <a:r>
-                        <a:rPr sz="1300" dirty="0" err="1">
-                          <a:solidFill>
-                            <a:srgbClr val="000000"/>
-                          </a:solidFill>
-                          <a:latin typeface="Calibri"/>
-                        </a:rPr>
-                        <a:t>por</a:t>
-                      </a:r>
-                      <a:r>
-                        <a:rPr sz="1300" dirty="0">
-                          <a:solidFill>
-                            <a:srgbClr val="000000"/>
-                          </a:solidFill>
-                          <a:latin typeface="Calibri"/>
-                        </a:rPr>
-                        <a:t> </a:t>
-                      </a:r>
-                      <a:r>
-                        <a:rPr sz="1300" dirty="0" err="1">
-                          <a:solidFill>
-                            <a:srgbClr val="000000"/>
-                          </a:solidFill>
-                          <a:latin typeface="Calibri"/>
-                        </a:rPr>
-                        <a:t>celda</a:t>
-                      </a:r>
-                      <a:r>
-                        <a:rPr sz="1300" dirty="0">
-                          <a:solidFill>
-                            <a:srgbClr val="000000"/>
-                          </a:solidFill>
-                          <a:latin typeface="Calibri"/>
-                        </a:rPr>
-                        <a:t> — </a:t>
+                        <a:t>— </a:t>
                       </a:r>
                       <a:r>
                         <a:rPr sz="1300" dirty="0" err="1">
